--- a/reports/architecture_manuscript_figure.pptx
+++ b/reports/architecture_manuscript_figure.pptx
@@ -17200,7 +17200,7 @@
         </p:nvSpPr>
         <p:spPr>
           <a:xfrm>
-            <a:off x="2990088" y="3685946"/>
+            <a:off x="2505456" y="3867912"/>
             <a:ext cx="585216" cy="265176"/>
           </a:xfrm>
           <a:prstGeom prst="rect">
